--- a/media/resources/files/EkiOrunduuOnduktar_KOBOYTUU_BOLUU_JenilOrtoOor_tXXHHTY.pptx
+++ b/media/resources/files/EkiOrunduuOnduktar_KOBOYTUU_BOLUU_JenilOrtoOor_tXXHHTY.pptx
@@ -2070,7 +2070,7 @@
             <a:pPr algn="ctr"/>
             <a:r>
               <a:rPr lang="en-GB" sz="2000" dirty="0"/>
-              <a:t>7 × 0.1</a:t>
+              <a:t>7 × 0,1</a:t>
             </a:r>
           </a:p>
         </p:txBody>
@@ -2147,7 +2147,7 @@
             <a:pPr algn="ctr"/>
             <a:r>
               <a:rPr lang="en-GB" sz="2000" dirty="0"/>
-              <a:t>3.2 × 4</a:t>
+              <a:t>3,2 × 4</a:t>
             </a:r>
           </a:p>
         </p:txBody>
@@ -2224,7 +2224,7 @@
             <a:pPr algn="ctr"/>
             <a:r>
               <a:rPr lang="en-GB" sz="2000" dirty="0"/>
-              <a:t>0.06 × 2.8</a:t>
+              <a:t>0,06 × 2,8</a:t>
             </a:r>
           </a:p>
         </p:txBody>
@@ -2301,7 +2301,7 @@
             <a:pPr algn="ctr"/>
             <a:r>
               <a:rPr lang="en-GB" sz="2000" dirty="0"/>
-              <a:t>9 × 0.3</a:t>
+              <a:t>9 × 0,3</a:t>
             </a:r>
           </a:p>
         </p:txBody>
@@ -2378,7 +2378,7 @@
             <a:pPr algn="ctr"/>
             <a:r>
               <a:rPr lang="en-GB" sz="2000" dirty="0"/>
-              <a:t>1.9 × 1.1</a:t>
+              <a:t>1,9 × 1,1</a:t>
             </a:r>
           </a:p>
         </p:txBody>
@@ -2455,7 +2455,7 @@
             <a:pPr algn="ctr"/>
             <a:r>
               <a:rPr lang="en-GB" sz="2000" dirty="0"/>
-              <a:t>0.37 × 0.23</a:t>
+              <a:t>0,37 × 0,23</a:t>
             </a:r>
           </a:p>
         </p:txBody>
@@ -2532,7 +2532,7 @@
             <a:pPr algn="ctr"/>
             <a:r>
               <a:rPr lang="en-GB" sz="2000" dirty="0"/>
-              <a:t>0.37 × 2</a:t>
+              <a:t>0,37 × 2</a:t>
             </a:r>
           </a:p>
         </p:txBody>
@@ -2609,7 +2609,7 @@
             <a:pPr algn="ctr"/>
             <a:r>
               <a:rPr lang="en-GB" sz="2000" dirty="0"/>
-              <a:t>0.62 × 0.3</a:t>
+              <a:t>0,62 × 0,3</a:t>
             </a:r>
           </a:p>
         </p:txBody>
@@ -2686,7 +2686,7 @@
             <a:pPr algn="ctr"/>
             <a:r>
               <a:rPr lang="en-GB" sz="2000" dirty="0"/>
-              <a:t>0.19 × 1.27</a:t>
+              <a:t>0,19 × 1,27</a:t>
             </a:r>
           </a:p>
         </p:txBody>
@@ -2763,7 +2763,7 @@
             <a:pPr algn="ctr"/>
             <a:r>
               <a:rPr lang="en-GB" sz="2000" dirty="0"/>
-              <a:t>6 ÷ 0.5</a:t>
+              <a:t>6 ÷ 0,5</a:t>
             </a:r>
           </a:p>
         </p:txBody>
@@ -2840,7 +2840,7 @@
             <a:pPr algn="ctr"/>
             <a:r>
               <a:rPr lang="en-GB" sz="2000" dirty="0"/>
-              <a:t>6 ÷ 0.15</a:t>
+              <a:t>6 ÷ 0,15</a:t>
             </a:r>
           </a:p>
         </p:txBody>
@@ -2917,7 +2917,7 @@
             <a:pPr algn="ctr"/>
             <a:r>
               <a:rPr lang="en-GB" sz="2000" dirty="0"/>
-              <a:t>1.2 ÷ 0.02</a:t>
+              <a:t>1,2 ÷ 0,02</a:t>
             </a:r>
           </a:p>
         </p:txBody>
@@ -2994,7 +2994,7 @@
             <a:pPr algn="ctr"/>
             <a:r>
               <a:rPr lang="en-GB" sz="2000" dirty="0"/>
-              <a:t>6 ÷ 1.2</a:t>
+              <a:t>6 ÷ 1,2</a:t>
             </a:r>
           </a:p>
         </p:txBody>
@@ -3071,7 +3071,7 @@
             <a:pPr algn="ctr"/>
             <a:r>
               <a:rPr lang="en-GB" sz="2000" dirty="0"/>
-              <a:t>1.02 ÷ 0.17</a:t>
+              <a:t>1,02 ÷ 0,17</a:t>
             </a:r>
           </a:p>
         </p:txBody>
@@ -3148,7 +3148,7 @@
             <a:pPr algn="ctr"/>
             <a:r>
               <a:rPr lang="en-GB" sz="2000" dirty="0"/>
-              <a:t>6.6 ÷ 0.12</a:t>
+              <a:t>6,6 ÷ 0,12</a:t>
             </a:r>
           </a:p>
         </p:txBody>
@@ -3225,7 +3225,7 @@
             <a:pPr algn="ctr"/>
             <a:r>
               <a:rPr lang="en-GB" sz="2000" dirty="0"/>
-              <a:t>6 ÷ 0.03</a:t>
+              <a:t>6 ÷ 0,03</a:t>
             </a:r>
           </a:p>
         </p:txBody>
@@ -3302,7 +3302,7 @@
             <a:pPr algn="ctr"/>
             <a:r>
               <a:rPr lang="en-GB" sz="2000" dirty="0"/>
-              <a:t>7.44 ÷ 0.24</a:t>
+              <a:t>7,44 ÷ 0,24</a:t>
             </a:r>
           </a:p>
         </p:txBody>
@@ -3379,7 +3379,7 @@
             <a:pPr algn="ctr"/>
             <a:r>
               <a:rPr lang="en-GB" sz="2000" dirty="0"/>
-              <a:t>18.2 ÷ 2.8</a:t>
+              <a:t>18,2 ÷ 2,8</a:t>
             </a:r>
           </a:p>
         </p:txBody>
@@ -3939,7 +3939,7 @@
           <a:p>
             <a:r>
               <a:rPr lang="en-GB" sz="2000" dirty="0"/>
-              <a:t>= 0.7</a:t>
+              <a:t>= 0,7</a:t>
             </a:r>
           </a:p>
         </p:txBody>
@@ -3975,7 +3975,7 @@
             <a:pPr algn="ctr"/>
             <a:r>
               <a:rPr lang="en-GB" sz="2000" dirty="0"/>
-              <a:t>7 × 0.1</a:t>
+              <a:t>7 × 0,1</a:t>
             </a:r>
           </a:p>
         </p:txBody>
@@ -4059,7 +4059,7 @@
             <a:pPr algn="ctr"/>
             <a:r>
               <a:rPr lang="en-GB" sz="2000" dirty="0"/>
-              <a:t>= 12.8</a:t>
+              <a:t>= 12,8</a:t>
             </a:r>
           </a:p>
         </p:txBody>
@@ -4095,7 +4095,7 @@
             <a:pPr algn="ctr"/>
             <a:r>
               <a:rPr lang="en-GB" sz="2000" dirty="0"/>
-              <a:t>3.2 × 4</a:t>
+              <a:t>3,2 × 4</a:t>
             </a:r>
           </a:p>
         </p:txBody>
@@ -4178,7 +4178,7 @@
           <a:p>
             <a:r>
               <a:rPr lang="en-GB" sz="2000" dirty="0"/>
-              <a:t>= 0.168</a:t>
+              <a:t>= 0,168</a:t>
             </a:r>
           </a:p>
         </p:txBody>
@@ -4214,7 +4214,7 @@
             <a:pPr algn="ctr"/>
             <a:r>
               <a:rPr lang="en-GB" sz="2000" dirty="0"/>
-              <a:t>0.06 × 2.8</a:t>
+              <a:t>0,06 × 2,8</a:t>
             </a:r>
           </a:p>
         </p:txBody>
@@ -4297,7 +4297,7 @@
           <a:p>
             <a:r>
               <a:rPr lang="en-GB" sz="2000" dirty="0"/>
-              <a:t>= 2.7</a:t>
+              <a:t>= 2,7</a:t>
             </a:r>
           </a:p>
         </p:txBody>
@@ -4333,7 +4333,7 @@
             <a:pPr algn="ctr"/>
             <a:r>
               <a:rPr lang="en-GB" sz="2000" dirty="0"/>
-              <a:t>9 × 0.3</a:t>
+              <a:t>9 × 0,3</a:t>
             </a:r>
           </a:p>
         </p:txBody>
@@ -4417,7 +4417,7 @@
             <a:pPr algn="ctr"/>
             <a:r>
               <a:rPr lang="en-GB" sz="2000" dirty="0"/>
-              <a:t>= 2.09</a:t>
+              <a:t>= 2,09</a:t>
             </a:r>
           </a:p>
         </p:txBody>
@@ -4453,7 +4453,7 @@
             <a:pPr algn="ctr"/>
             <a:r>
               <a:rPr lang="en-GB" sz="2000" dirty="0"/>
-              <a:t>1.9 × 1.1</a:t>
+              <a:t>1,9 × 1,1</a:t>
             </a:r>
           </a:p>
         </p:txBody>
@@ -4536,7 +4536,7 @@
           <a:p>
             <a:r>
               <a:rPr lang="en-GB" sz="2000" dirty="0"/>
-              <a:t>= 0.0851</a:t>
+              <a:t>= 0,0851</a:t>
             </a:r>
           </a:p>
         </p:txBody>
@@ -4572,7 +4572,7 @@
             <a:pPr algn="ctr"/>
             <a:r>
               <a:rPr lang="en-GB" sz="2000" dirty="0"/>
-              <a:t>0.37 × 0.23</a:t>
+              <a:t>0,37 × 0,23</a:t>
             </a:r>
           </a:p>
         </p:txBody>
@@ -4655,7 +4655,7 @@
           <a:p>
             <a:r>
               <a:rPr lang="en-GB" sz="2000" dirty="0"/>
-              <a:t>= 0.74</a:t>
+              <a:t>= 0,74</a:t>
             </a:r>
           </a:p>
         </p:txBody>
@@ -4691,7 +4691,7 @@
             <a:pPr algn="ctr"/>
             <a:r>
               <a:rPr lang="en-GB" sz="2000" dirty="0"/>
-              <a:t>0.37 × 2</a:t>
+              <a:t>0,37 × 2</a:t>
             </a:r>
           </a:p>
         </p:txBody>
@@ -4775,7 +4775,7 @@
             <a:pPr algn="ctr"/>
             <a:r>
               <a:rPr lang="en-GB" sz="2000" dirty="0"/>
-              <a:t>= 0.186</a:t>
+              <a:t>= 0,186</a:t>
             </a:r>
           </a:p>
         </p:txBody>
@@ -4811,7 +4811,7 @@
             <a:pPr algn="ctr"/>
             <a:r>
               <a:rPr lang="en-GB" sz="2000" dirty="0"/>
-              <a:t>0.62 × 0.3</a:t>
+              <a:t>0,62 × 0,3</a:t>
             </a:r>
           </a:p>
         </p:txBody>
@@ -4894,7 +4894,7 @@
           <a:p>
             <a:r>
               <a:rPr lang="en-GB" sz="2000" dirty="0"/>
-              <a:t>= 0.2413</a:t>
+              <a:t>= 0,2413</a:t>
             </a:r>
           </a:p>
         </p:txBody>
@@ -4930,7 +4930,7 @@
             <a:pPr algn="ctr"/>
             <a:r>
               <a:rPr lang="en-GB" sz="2000" dirty="0"/>
-              <a:t>0.19 × 1.27</a:t>
+              <a:t>0,19 × 1,27</a:t>
             </a:r>
           </a:p>
         </p:txBody>
@@ -5049,7 +5049,7 @@
             <a:pPr algn="ctr"/>
             <a:r>
               <a:rPr lang="en-GB" sz="2000" dirty="0"/>
-              <a:t>6 ÷ 0.5</a:t>
+              <a:t>6 ÷ 0,5</a:t>
             </a:r>
           </a:p>
         </p:txBody>
@@ -5168,7 +5168,7 @@
             <a:pPr algn="ctr"/>
             <a:r>
               <a:rPr lang="en-GB" sz="2000" dirty="0"/>
-              <a:t>6 ÷ 0.15</a:t>
+              <a:t>6 ÷ 0,15</a:t>
             </a:r>
           </a:p>
         </p:txBody>
@@ -5287,7 +5287,7 @@
             <a:pPr algn="ctr"/>
             <a:r>
               <a:rPr lang="en-GB" sz="2000" dirty="0"/>
-              <a:t>1.2 ÷ 0.02</a:t>
+              <a:t>1,2 ÷ 0,02</a:t>
             </a:r>
           </a:p>
         </p:txBody>
@@ -5406,7 +5406,7 @@
             <a:pPr algn="ctr"/>
             <a:r>
               <a:rPr lang="en-GB" sz="2000" dirty="0"/>
-              <a:t>6 ÷ 1.2</a:t>
+              <a:t>6 ÷ 1,2</a:t>
             </a:r>
           </a:p>
         </p:txBody>
@@ -5525,7 +5525,7 @@
             <a:pPr algn="ctr"/>
             <a:r>
               <a:rPr lang="en-GB" sz="2000" dirty="0"/>
-              <a:t>1.02 ÷ 0.17</a:t>
+              <a:t>1,02 ÷ 0,17</a:t>
             </a:r>
           </a:p>
         </p:txBody>
@@ -5644,7 +5644,7 @@
             <a:pPr algn="ctr"/>
             <a:r>
               <a:rPr lang="en-GB" sz="2000" dirty="0"/>
-              <a:t>6.6 ÷ 0.12</a:t>
+              <a:t>6,6 ÷ 0,12</a:t>
             </a:r>
           </a:p>
         </p:txBody>
@@ -5763,7 +5763,7 @@
             <a:pPr algn="ctr"/>
             <a:r>
               <a:rPr lang="en-GB" sz="2000" dirty="0"/>
-              <a:t>6 ÷ 0.03</a:t>
+              <a:t>6 ÷ 0,03</a:t>
             </a:r>
           </a:p>
         </p:txBody>
@@ -5882,7 +5882,7 @@
             <a:pPr algn="ctr"/>
             <a:r>
               <a:rPr lang="en-GB" sz="2000" dirty="0"/>
-              <a:t>7.44 ÷ 0.24</a:t>
+              <a:t>7,44 ÷ 0,24</a:t>
             </a:r>
           </a:p>
         </p:txBody>
@@ -5965,7 +5965,7 @@
           <a:p>
             <a:r>
               <a:rPr lang="en-GB" sz="2000" dirty="0"/>
-              <a:t>= 6.5</a:t>
+              <a:t>= 6,5</a:t>
             </a:r>
           </a:p>
         </p:txBody>
@@ -6001,7 +6001,7 @@
             <a:pPr algn="ctr"/>
             <a:r>
               <a:rPr lang="en-GB" sz="2000" dirty="0"/>
-              <a:t>18.2 ÷ 2.8</a:t>
+              <a:t>18,2 ÷ 2,8</a:t>
             </a:r>
           </a:p>
         </p:txBody>
